--- a/AVERA_Pitch_Aviation.pptx
+++ b/AVERA_Pitch_Aviation.pptx
@@ -1517,6 +1517,10 @@
           </a:solidFill>
           <a:ln/>
         </p:spPr>
+        <p:txBody>
+          <a:bodyPr/>
+          <a:p/>
+        </p:txBody>
       </p:sp>
       <p:sp>
         <p:nvSpPr>
@@ -1537,6 +1541,10 @@
           </a:solidFill>
           <a:ln/>
         </p:spPr>
+        <p:txBody>
+          <a:bodyPr/>
+          <a:p/>
+        </p:txBody>
       </p:sp>
       <p:sp>
         <p:nvSpPr>
@@ -1730,6 +1738,10 @@
           </a:solidFill>
           <a:ln/>
         </p:spPr>
+        <p:txBody>
+          <a:bodyPr/>
+          <a:p/>
+        </p:txBody>
       </p:sp>
       <p:sp>
         <p:nvSpPr>
@@ -1764,7 +1776,7 @@
                 <a:ea typeface="Calibri" pitchFamily="34" charset="-122"/>
                 <a:cs typeface="Calibri" pitchFamily="34" charset="-120"/>
               </a:rPr>
-              <a:t>Live Demo: avera-demo.up.railway.app   ·   Contact: mgaloyan79@gmail.com</a:t>
+              <a:t>Live Demo: avera-production.up.railway.app   ·   Contact: mgaloyan79@gmail.com</a:t>
             </a:r>
             <a:endParaRPr lang="en-US" sz="1000" dirty="0"/>
           </a:p>
@@ -1821,6 +1833,10 @@
           </a:solidFill>
           <a:ln/>
         </p:spPr>
+        <p:txBody>
+          <a:bodyPr/>
+          <a:p/>
+        </p:txBody>
       </p:sp>
       <p:sp>
         <p:nvSpPr>
@@ -1887,6 +1903,10 @@
             </a:outerShdw>
           </a:effectLst>
         </p:spPr>
+        <p:txBody>
+          <a:bodyPr/>
+          <a:p/>
+        </p:txBody>
       </p:sp>
       <p:sp>
         <p:nvSpPr>
@@ -1907,6 +1927,10 @@
           </a:solidFill>
           <a:ln/>
         </p:spPr>
+        <p:txBody>
+          <a:bodyPr/>
+          <a:p/>
+        </p:txBody>
       </p:sp>
       <p:sp>
         <p:nvSpPr>
@@ -2087,6 +2111,10 @@
             </a:outerShdw>
           </a:effectLst>
         </p:spPr>
+        <p:txBody>
+          <a:bodyPr/>
+          <a:p/>
+        </p:txBody>
       </p:sp>
       <p:sp>
         <p:nvSpPr>
@@ -2107,6 +2135,10 @@
           </a:solidFill>
           <a:ln/>
         </p:spPr>
+        <p:txBody>
+          <a:bodyPr/>
+          <a:p/>
+        </p:txBody>
       </p:sp>
       <p:sp>
         <p:nvSpPr>
@@ -2287,6 +2319,10 @@
             </a:outerShdw>
           </a:effectLst>
         </p:spPr>
+        <p:txBody>
+          <a:bodyPr/>
+          <a:p/>
+        </p:txBody>
       </p:sp>
       <p:sp>
         <p:nvSpPr>
@@ -2307,6 +2343,10 @@
           </a:solidFill>
           <a:ln/>
         </p:spPr>
+        <p:txBody>
+          <a:bodyPr/>
+          <a:p/>
+        </p:txBody>
       </p:sp>
       <p:sp>
         <p:nvSpPr>
@@ -2653,6 +2693,10 @@
             </a:outerShdw>
           </a:effectLst>
         </p:spPr>
+        <p:txBody>
+          <a:bodyPr/>
+          <a:p/>
+        </p:txBody>
       </p:sp>
       <p:sp>
         <p:nvSpPr>
@@ -2673,6 +2717,10 @@
           </a:solidFill>
           <a:ln/>
         </p:spPr>
+        <p:txBody>
+          <a:bodyPr/>
+          <a:p/>
+        </p:txBody>
       </p:sp>
       <p:sp>
         <p:nvSpPr>
@@ -2817,6 +2865,10 @@
             </a:outerShdw>
           </a:effectLst>
         </p:spPr>
+        <p:txBody>
+          <a:bodyPr/>
+          <a:p/>
+        </p:txBody>
       </p:sp>
       <p:sp>
         <p:nvSpPr>
@@ -2837,6 +2889,10 @@
           </a:solidFill>
           <a:ln/>
         </p:spPr>
+        <p:txBody>
+          <a:bodyPr/>
+          <a:p/>
+        </p:txBody>
       </p:sp>
       <p:sp>
         <p:nvSpPr>
@@ -2981,6 +3037,10 @@
             </a:outerShdw>
           </a:effectLst>
         </p:spPr>
+        <p:txBody>
+          <a:bodyPr/>
+          <a:p/>
+        </p:txBody>
       </p:sp>
       <p:sp>
         <p:nvSpPr>
@@ -3001,6 +3061,10 @@
           </a:solidFill>
           <a:ln/>
         </p:spPr>
+        <p:txBody>
+          <a:bodyPr/>
+          <a:p/>
+        </p:txBody>
       </p:sp>
       <p:sp>
         <p:nvSpPr>
@@ -3145,6 +3209,10 @@
             </a:outerShdw>
           </a:effectLst>
         </p:spPr>
+        <p:txBody>
+          <a:bodyPr/>
+          <a:p/>
+        </p:txBody>
       </p:sp>
       <p:sp>
         <p:nvSpPr>
@@ -3165,6 +3233,10 @@
           </a:solidFill>
           <a:ln/>
         </p:spPr>
+        <p:txBody>
+          <a:bodyPr/>
+          <a:p/>
+        </p:txBody>
       </p:sp>
       <p:sp>
         <p:nvSpPr>
@@ -3334,6 +3406,10 @@
           </a:solidFill>
           <a:ln/>
         </p:spPr>
+        <p:txBody>
+          <a:bodyPr/>
+          <a:p/>
+        </p:txBody>
       </p:sp>
       <p:sp>
         <p:nvSpPr>
@@ -3393,6 +3469,10 @@
           </a:solidFill>
           <a:ln/>
         </p:spPr>
+        <p:txBody>
+          <a:bodyPr/>
+          <a:p/>
+        </p:txBody>
       </p:sp>
       <p:sp>
         <p:nvSpPr>
@@ -3413,6 +3493,10 @@
           </a:solidFill>
           <a:ln/>
         </p:spPr>
+        <p:txBody>
+          <a:bodyPr/>
+          <a:p/>
+        </p:txBody>
       </p:sp>
       <p:sp>
         <p:nvSpPr>
@@ -3550,6 +3634,10 @@
           </a:solidFill>
           <a:ln/>
         </p:spPr>
+        <p:txBody>
+          <a:bodyPr/>
+          <a:p/>
+        </p:txBody>
       </p:sp>
       <p:sp>
         <p:nvSpPr>
@@ -3570,6 +3658,10 @@
           </a:solidFill>
           <a:ln/>
         </p:spPr>
+        <p:txBody>
+          <a:bodyPr/>
+          <a:p/>
+        </p:txBody>
       </p:sp>
       <p:sp>
         <p:nvSpPr>
@@ -3707,6 +3799,10 @@
           </a:solidFill>
           <a:ln/>
         </p:spPr>
+        <p:txBody>
+          <a:bodyPr/>
+          <a:p/>
+        </p:txBody>
       </p:sp>
       <p:sp>
         <p:nvSpPr>
@@ -3727,6 +3823,10 @@
           </a:solidFill>
           <a:ln/>
         </p:spPr>
+        <p:txBody>
+          <a:bodyPr/>
+          <a:p/>
+        </p:txBody>
       </p:sp>
       <p:sp>
         <p:nvSpPr>
@@ -3864,6 +3964,10 @@
           </a:solidFill>
           <a:ln/>
         </p:spPr>
+        <p:txBody>
+          <a:bodyPr/>
+          <a:p/>
+        </p:txBody>
       </p:sp>
       <p:sp>
         <p:nvSpPr>
@@ -4118,6 +4222,10 @@
             </a:outerShdw>
           </a:effectLst>
         </p:spPr>
+        <p:txBody>
+          <a:bodyPr/>
+          <a:p/>
+        </p:txBody>
       </p:sp>
       <p:sp>
         <p:nvSpPr>
@@ -4262,6 +4370,10 @@
             </a:outerShdw>
           </a:effectLst>
         </p:spPr>
+        <p:txBody>
+          <a:bodyPr/>
+          <a:p/>
+        </p:txBody>
       </p:sp>
       <p:sp>
         <p:nvSpPr>
@@ -4406,6 +4518,10 @@
             </a:outerShdw>
           </a:effectLst>
         </p:spPr>
+        <p:txBody>
+          <a:bodyPr/>
+          <a:p/>
+        </p:txBody>
       </p:sp>
       <p:sp>
         <p:nvSpPr>
@@ -4550,6 +4666,10 @@
             </a:outerShdw>
           </a:effectLst>
         </p:spPr>
+        <p:txBody>
+          <a:bodyPr/>
+          <a:p/>
+        </p:txBody>
       </p:sp>
       <p:sp>
         <p:nvSpPr>
@@ -4758,6 +4878,10 @@
           </a:solidFill>
           <a:ln/>
         </p:spPr>
+        <p:txBody>
+          <a:bodyPr/>
+          <a:p/>
+        </p:txBody>
       </p:sp>
       <p:sp>
         <p:nvSpPr>
@@ -6511,6 +6635,10 @@
             </a:outerShdw>
           </a:effectLst>
         </p:spPr>
+        <p:txBody>
+          <a:bodyPr/>
+          <a:p/>
+        </p:txBody>
       </p:sp>
       <p:sp>
         <p:nvSpPr>
@@ -6545,7 +6673,7 @@
                 <a:ea typeface="Consolas" pitchFamily="34" charset="-122"/>
                 <a:cs typeface="Consolas" pitchFamily="34" charset="-120"/>
               </a:rPr>
-              <a:t>https://avera-demo.up.railway.app</a:t>
+              <a:t>https://avera-production.up.railway.app</a:t>
             </a:r>
             <a:endParaRPr lang="en-US" sz="2200" dirty="0"/>
           </a:p>
@@ -6804,6 +6932,10 @@
           </a:solidFill>
           <a:ln/>
         </p:spPr>
+        <p:txBody>
+          <a:bodyPr/>
+          <a:p/>
+        </p:txBody>
       </p:sp>
       <p:sp>
         <p:nvSpPr>
@@ -6895,6 +7027,10 @@
           </a:solidFill>
           <a:ln/>
         </p:spPr>
+        <p:txBody>
+          <a:bodyPr/>
+          <a:p/>
+        </p:txBody>
       </p:sp>
       <p:sp>
         <p:nvSpPr>
@@ -6915,6 +7051,10 @@
           </a:solidFill>
           <a:ln/>
         </p:spPr>
+        <p:txBody>
+          <a:bodyPr/>
+          <a:p/>
+        </p:txBody>
       </p:sp>
       <p:sp>
         <p:nvSpPr>
@@ -7054,6 +7194,10 @@
             </a:outerShdw>
           </a:effectLst>
         </p:spPr>
+        <p:txBody>
+          <a:bodyPr/>
+          <a:p/>
+        </p:txBody>
       </p:sp>
       <p:sp>
         <p:nvSpPr>
@@ -7163,7 +7307,7 @@
                 <a:ea typeface="Calibri" pitchFamily="34" charset="-122"/>
                 <a:cs typeface="Calibri" pitchFamily="34" charset="-120"/>
               </a:rPr>
-              <a:t>avera-demo.up.railway.app</a:t>
+              <a:t>avera-production.up.railway.app</a:t>
             </a:r>
             <a:endParaRPr lang="en-US" sz="900" dirty="0"/>
           </a:p>
@@ -7195,6 +7339,10 @@
             </a:outerShdw>
           </a:effectLst>
         </p:spPr>
+        <p:txBody>
+          <a:bodyPr/>
+          <a:p/>
+        </p:txBody>
       </p:sp>
       <p:sp>
         <p:nvSpPr>
@@ -7336,6 +7484,10 @@
             </a:outerShdw>
           </a:effectLst>
         </p:spPr>
+        <p:txBody>
+          <a:bodyPr/>
+          <a:p/>
+        </p:txBody>
       </p:sp>
       <p:sp>
         <p:nvSpPr>
